--- a/dataset/guides/SYS/guide/IT-SYS-004_메일 이용 장애 대응 가이드.pptx
+++ b/dataset/guides/SYS/guide/IT-SYS-004_메일 이용 장애 대응 가이드.pptx
@@ -7259,27 +7259,6 @@
             <a:endParaRPr lang="en-US" sz="1200" dirty="0"/>
           </a:p>
           <a:p>
-            <a:pPr marL="152400" indent="-152400">
-              <a:spcAft>
-                <a:spcPts val="300"/>
-              </a:spcAft>
-              <a:buSzPct val="100000"/>
-              <a:buChar char="•"/>
-            </a:pPr>
-            <a:r>
-              <a:rPr lang="en-US" sz="1200" dirty="0">
-                <a:solidFill>
-                  <a:srgbClr val="1E2A36"/>
-                </a:solidFill>
-                <a:latin typeface="맑은 고딕" pitchFamily="34" charset="0"/>
-                <a:ea typeface="맑은 고딕" pitchFamily="34" charset="-122"/>
-                <a:cs typeface="맑은 고딕" pitchFamily="34" charset="-120"/>
-              </a:rPr>
-              <a:t>고객사가 메일을 보냈다는데 받지 못했다.</a:t>
-            </a:r>
-            <a:endParaRPr lang="en-US" sz="1200" dirty="0"/>
-          </a:p>
-          <a:p>
             <a:pPr indent="0" marL="0">
               <a:spcBef>
                 <a:spcPts val="400"/>
@@ -12961,27 +12940,6 @@
                 <a:ea typeface="맑은 고딕" pitchFamily="34" charset="-122"/>
                 <a:cs typeface="맑은 고딕" pitchFamily="34" charset="-120"/>
               </a:rPr>
-              <a:t>메일 용량이 다 찼다고 빨간 경고가 뜬다.</a:t>
-            </a:r>
-            <a:endParaRPr lang="en-US" sz="1200" dirty="0"/>
-          </a:p>
-          <a:p>
-            <a:pPr marL="152400" indent="-152400">
-              <a:spcAft>
-                <a:spcPts val="300"/>
-              </a:spcAft>
-              <a:buSzPct val="100000"/>
-              <a:buChar char="•"/>
-            </a:pPr>
-            <a:r>
-              <a:rPr lang="en-US" sz="1200" dirty="0">
-                <a:solidFill>
-                  <a:srgbClr val="1E2A36"/>
-                </a:solidFill>
-                <a:latin typeface="맑은 고딕" pitchFamily="34" charset="0"/>
-                <a:ea typeface="맑은 고딕" pitchFamily="34" charset="-122"/>
-                <a:cs typeface="맑은 고딕" pitchFamily="34" charset="-120"/>
-              </a:rPr>
               <a:t>메일함 용량 부족 경고가 계속 떠서 용량을 늘릴 수 있는지 궁금하다.</a:t>
             </a:r>
             <a:endParaRPr lang="en-US" sz="1200" dirty="0"/>
@@ -18669,27 +18627,6 @@
                 <a:cs typeface="맑은 고딕" pitchFamily="34" charset="-120"/>
               </a:rPr>
               <a:t>해외 거래처로 보낸 메일이 전부 반송되고, 팀 전체가 같은 증상이다.</a:t>
-            </a:r>
-            <a:endParaRPr lang="en-US" sz="1200" dirty="0"/>
-          </a:p>
-          <a:p>
-            <a:pPr marL="152400" indent="-152400">
-              <a:spcAft>
-                <a:spcPts val="300"/>
-              </a:spcAft>
-              <a:buSzPct val="100000"/>
-              <a:buChar char="•"/>
-            </a:pPr>
-            <a:r>
-              <a:rPr lang="en-US" sz="1200" dirty="0">
-                <a:solidFill>
-                  <a:srgbClr val="1E2A36"/>
-                </a:solidFill>
-                <a:latin typeface="맑은 고딕" pitchFamily="34" charset="0"/>
-                <a:ea typeface="맑은 고딕" pitchFamily="34" charset="-122"/>
-                <a:cs typeface="맑은 고딕" pitchFamily="34" charset="-120"/>
-              </a:rPr>
-              <a:t>해외로 보낸 메일이 전부 되돌아오고, 팀원들도 그렇다.</a:t>
             </a:r>
             <a:endParaRPr lang="en-US" sz="1200" dirty="0"/>
           </a:p>
